--- a/FIM_BookJ4_Objections.pptx
+++ b/FIM_BookJ4_Objections.pptx
@@ -3229,7 +3229,7 @@
       </p:sp>
       <p:pic>
         <p:nvPicPr>
-          <p:cNvPr id="5" name="Picture 4" descr="shy_logo_v2.png"/>
+          <p:cNvPr id="5" name="Picture 4" descr="shy_logo.png"/>
           <p:cNvPicPr>
             <a:picLocks noChangeAspect="1"/>
           </p:cNvPicPr>
@@ -3244,7 +3244,7 @@
         <p:spPr>
           <a:xfrm>
             <a:off x="274320" y="548640"/>
-            <a:ext cx="1124321" cy="1097280"/>
+            <a:ext cx="2275114" cy="1005840"/>
           </a:xfrm>
           <a:prstGeom prst="rect">
             <a:avLst/>
@@ -3679,9 +3679,33 @@
           </a:p>
         </p:txBody>
       </p:sp>
-      <p:sp>
-        <p:nvSpPr>
-          <p:cNvPr id="17" name="Rectangle 16"/>
+      <p:pic>
+        <p:nvPicPr>
+          <p:cNvPr id="17" name="Picture 16" descr="shy_logo.png"/>
+          <p:cNvPicPr>
+            <a:picLocks noChangeAspect="1"/>
+          </p:cNvPicPr>
+          <p:nvPr/>
+        </p:nvPicPr>
+        <p:blipFill>
+          <a:blip r:embed="rId2"/>
+          <a:stretch>
+            <a:fillRect/>
+          </a:stretch>
+        </p:blipFill>
+        <p:spPr>
+          <a:xfrm>
+            <a:off x="7024115" y="5212080"/>
+            <a:ext cx="2895600" cy="1280160"/>
+          </a:xfrm>
+          <a:prstGeom prst="rect">
+            <a:avLst/>
+          </a:prstGeom>
+        </p:spPr>
+      </p:pic>
+      <p:sp>
+        <p:nvSpPr>
+          <p:cNvPr id="18" name="Rectangle 17"/>
           <p:cNvSpPr/>
           <p:nvPr/>
         </p:nvSpPr>
@@ -3724,7 +3748,7 @@
       </p:sp>
       <p:sp>
         <p:nvSpPr>
-          <p:cNvPr id="18" name="Rectangle 17"/>
+          <p:cNvPr id="19" name="Rectangle 18"/>
           <p:cNvSpPr/>
           <p:nvPr/>
         </p:nvSpPr>
@@ -3767,7 +3791,7 @@
       </p:sp>
       <p:sp>
         <p:nvSpPr>
-          <p:cNvPr id="19" name="TextBox 18"/>
+          <p:cNvPr id="20" name="TextBox 19"/>
           <p:cNvSpPr txBox="1"/>
           <p:nvPr/>
         </p:nvSpPr>
@@ -4608,7 +4632,7 @@
       </p:sp>
       <p:pic>
         <p:nvPicPr>
-          <p:cNvPr id="10" name="Picture 9" descr="shy_logo_v2.png"/>
+          <p:cNvPr id="10" name="Picture 9" descr="shy_logo.png"/>
           <p:cNvPicPr>
             <a:picLocks noChangeAspect="1"/>
           </p:cNvPicPr>
@@ -4622,8 +4646,8 @@
         </p:blipFill>
         <p:spPr>
           <a:xfrm>
-            <a:off x="5303520" y="5394960"/>
-            <a:ext cx="1030628" cy="1005840"/>
+            <a:off x="4439847" y="5029200"/>
+            <a:ext cx="3309257" cy="1463040"/>
           </a:xfrm>
           <a:prstGeom prst="rect">
             <a:avLst/>
